--- a/vertebrate_neural_architecture/vertebrate_neural_architecture_lecture_3.pptx
+++ b/vertebrate_neural_architecture/vertebrate_neural_architecture_lecture_3.pptx
@@ -8293,8 +8293,8 @@
         </p:blipFill>
         <p:spPr>
           <a:xfrm>
-            <a:off x="1197864" y="1737360"/>
-            <a:ext cx="9798558" cy="4983266"/>
+            <a:off x="1408176" y="1737360"/>
+            <a:ext cx="9377172" cy="4983297"/>
           </a:xfrm>
           <a:prstGeom prst="rect">
             <a:avLst/>

--- a/vertebrate_neural_architecture/vertebrate_neural_architecture_lecture_3.pptx
+++ b/vertebrate_neural_architecture/vertebrate_neural_architecture_lecture_3.pptx
@@ -5327,7 +5327,7 @@
                 </a:solidFill>
                 <a:latin typeface="Calibri"/>
               </a:rPr>
-              <a:t>Lecture 6.3 — The Vertebrate Brain, and How It Is Built</a:t>
+              <a:t>Lecture 6.3 — The Vertebrate Brain</a:t>
             </a:r>
           </a:p>
         </p:txBody>
